--- a/exports/pptx/lessons/senior-module-02-panchabhuta/day-08-project-session-1.pptx
+++ b/exports/pptx/lessons/senior-module-02-panchabhuta/day-08-project-session-1.pptx
@@ -14,9 +14,12 @@
     <p:sldId id="262" r:id="rId8"/>
     <p:sldId id="263" r:id="rId9"/>
     <p:sldId id="264" r:id="rId10"/>
+    <p:sldId id="265" r:id="rId11"/>
+    <p:sldId id="266" r:id="rId12"/>
+    <p:sldId id="267" r:id="rId13"/>
   </p:sldIdLst>
   <p:notesMasterIdLst>
-    <p:notesMasterId r:id="rId11"/>
+    <p:notesMasterId r:id="rId14"/>
   </p:notesMasterIdLst>
   <p:sldSz cx="9144000" cy="5143500"/>
   <p:notesSz cx="5143500" cy="9144000"/>
@@ -534,6 +537,270 @@
             <a:fld id="{F7021451-1387-4CA6-816F-3879F97B5CBC}" type="slidenum">
               <a:rPr lang="en-US"/>
               <a:t>1</a:t>
+            </a:fld>
+            <a:endParaRPr lang="en-US"/>
+          </a:p>
+        </p:txBody>
+      </p:sp>
+    </p:spTree>
+    <p:extLst>
+      <p:ext uri="{BB962C8B-B14F-4D97-AF65-F5344CB8AC3E}">
+        <p14:creationId xmlns:p14="http://schemas.microsoft.com/office/powerpoint/2010/main" val="1024086991"/>
+      </p:ext>
+    </p:extLst>
+  </p:cSld>
+  <p:clrMapOvr>
+    <a:masterClrMapping/>
+  </p:clrMapOvr>
+</p:notes>
+</file>
+
+<file path=ppt/notesSlides/notesSlide10.xml><?xml version="1.0" encoding="utf-8"?>
+<p:notes xmlns:a="http://schemas.openxmlformats.org/drawingml/2006/main" xmlns:r="http://schemas.openxmlformats.org/officeDocument/2006/relationships" xmlns:p="http://schemas.openxmlformats.org/presentationml/2006/main">
+  <p:cSld>
+    <p:spTree>
+      <p:nvGrpSpPr>
+        <p:cNvPr id="1" name=""/>
+        <p:cNvGrpSpPr/>
+        <p:nvPr/>
+      </p:nvGrpSpPr>
+      <p:grpSpPr>
+        <a:xfrm>
+          <a:off x="0" y="0"/>
+          <a:ext cx="0" cy="0"/>
+          <a:chOff x="0" y="0"/>
+          <a:chExt cx="0" cy="0"/>
+        </a:xfrm>
+      </p:grpSpPr>
+      <p:sp>
+        <p:nvSpPr>
+          <p:cNvPr id="2" name="Slide Image Placeholder 1"/>
+          <p:cNvSpPr>
+            <a:spLocks noGrp="1" noRot="1" noChangeAspect="1"/>
+          </p:cNvSpPr>
+          <p:nvPr>
+            <p:ph type="sldImg"/>
+          </p:nvPr>
+        </p:nvSpPr>
+        <p:spPr/>
+      </p:sp>
+      <p:sp>
+        <p:nvSpPr>
+          <p:cNvPr id="3" name="Notes Placeholder 2"/>
+          <p:cNvSpPr>
+            <a:spLocks noGrp="1"/>
+          </p:cNvSpPr>
+          <p:nvPr>
+            <p:ph type="body" idx="1"/>
+          </p:nvPr>
+        </p:nvSpPr>
+        <p:spPr/>
+        <p:txBody>
+          <a:bodyPr/>
+          <a:lstStyle/>
+          <a:p>
+            <a:r>
+              <a:rPr lang="en-US" dirty="0"/>
+              <a:t/>
+            </a:r>
+            <a:endParaRPr lang="en-US" dirty="0"/>
+          </a:p>
+        </p:txBody>
+      </p:sp>
+      <p:sp>
+        <p:nvSpPr>
+          <p:cNvPr id="4" name="Slide Number Placeholder 3"/>
+          <p:cNvSpPr>
+            <a:spLocks noGrp="1"/>
+          </p:cNvSpPr>
+          <p:nvPr>
+            <p:ph type="sldNum" sz="quarter" idx="10"/>
+          </p:nvPr>
+        </p:nvSpPr>
+        <p:spPr/>
+        <p:txBody>
+          <a:bodyPr/>
+          <a:lstStyle/>
+          <a:p>
+            <a:fld id="{F7021451-1387-4CA6-816F-3879F97B5CBC}" type="slidenum">
+              <a:rPr lang="en-US"/>
+              <a:t>10</a:t>
+            </a:fld>
+            <a:endParaRPr lang="en-US"/>
+          </a:p>
+        </p:txBody>
+      </p:sp>
+    </p:spTree>
+    <p:extLst>
+      <p:ext uri="{BB962C8B-B14F-4D97-AF65-F5344CB8AC3E}">
+        <p14:creationId xmlns:p14="http://schemas.microsoft.com/office/powerpoint/2010/main" val="1024086991"/>
+      </p:ext>
+    </p:extLst>
+  </p:cSld>
+  <p:clrMapOvr>
+    <a:masterClrMapping/>
+  </p:clrMapOvr>
+</p:notes>
+</file>
+
+<file path=ppt/notesSlides/notesSlide11.xml><?xml version="1.0" encoding="utf-8"?>
+<p:notes xmlns:a="http://schemas.openxmlformats.org/drawingml/2006/main" xmlns:r="http://schemas.openxmlformats.org/officeDocument/2006/relationships" xmlns:p="http://schemas.openxmlformats.org/presentationml/2006/main">
+  <p:cSld>
+    <p:spTree>
+      <p:nvGrpSpPr>
+        <p:cNvPr id="1" name=""/>
+        <p:cNvGrpSpPr/>
+        <p:nvPr/>
+      </p:nvGrpSpPr>
+      <p:grpSpPr>
+        <a:xfrm>
+          <a:off x="0" y="0"/>
+          <a:ext cx="0" cy="0"/>
+          <a:chOff x="0" y="0"/>
+          <a:chExt cx="0" cy="0"/>
+        </a:xfrm>
+      </p:grpSpPr>
+      <p:sp>
+        <p:nvSpPr>
+          <p:cNvPr id="2" name="Slide Image Placeholder 1"/>
+          <p:cNvSpPr>
+            <a:spLocks noGrp="1" noRot="1" noChangeAspect="1"/>
+          </p:cNvSpPr>
+          <p:nvPr>
+            <p:ph type="sldImg"/>
+          </p:nvPr>
+        </p:nvSpPr>
+        <p:spPr/>
+      </p:sp>
+      <p:sp>
+        <p:nvSpPr>
+          <p:cNvPr id="3" name="Notes Placeholder 2"/>
+          <p:cNvSpPr>
+            <a:spLocks noGrp="1"/>
+          </p:cNvSpPr>
+          <p:nvPr>
+            <p:ph type="body" idx="1"/>
+          </p:nvPr>
+        </p:nvSpPr>
+        <p:spPr/>
+        <p:txBody>
+          <a:bodyPr/>
+          <a:lstStyle/>
+          <a:p>
+            <a:r>
+              <a:rPr lang="en-US" dirty="0"/>
+              <a:t/>
+            </a:r>
+            <a:endParaRPr lang="en-US" dirty="0"/>
+          </a:p>
+        </p:txBody>
+      </p:sp>
+      <p:sp>
+        <p:nvSpPr>
+          <p:cNvPr id="4" name="Slide Number Placeholder 3"/>
+          <p:cNvSpPr>
+            <a:spLocks noGrp="1"/>
+          </p:cNvSpPr>
+          <p:nvPr>
+            <p:ph type="sldNum" sz="quarter" idx="10"/>
+          </p:nvPr>
+        </p:nvSpPr>
+        <p:spPr/>
+        <p:txBody>
+          <a:bodyPr/>
+          <a:lstStyle/>
+          <a:p>
+            <a:fld id="{F7021451-1387-4CA6-816F-3879F97B5CBC}" type="slidenum">
+              <a:rPr lang="en-US"/>
+              <a:t>11</a:t>
+            </a:fld>
+            <a:endParaRPr lang="en-US"/>
+          </a:p>
+        </p:txBody>
+      </p:sp>
+    </p:spTree>
+    <p:extLst>
+      <p:ext uri="{BB962C8B-B14F-4D97-AF65-F5344CB8AC3E}">
+        <p14:creationId xmlns:p14="http://schemas.microsoft.com/office/powerpoint/2010/main" val="1024086991"/>
+      </p:ext>
+    </p:extLst>
+  </p:cSld>
+  <p:clrMapOvr>
+    <a:masterClrMapping/>
+  </p:clrMapOvr>
+</p:notes>
+</file>
+
+<file path=ppt/notesSlides/notesSlide12.xml><?xml version="1.0" encoding="utf-8"?>
+<p:notes xmlns:a="http://schemas.openxmlformats.org/drawingml/2006/main" xmlns:r="http://schemas.openxmlformats.org/officeDocument/2006/relationships" xmlns:p="http://schemas.openxmlformats.org/presentationml/2006/main">
+  <p:cSld>
+    <p:spTree>
+      <p:nvGrpSpPr>
+        <p:cNvPr id="1" name=""/>
+        <p:cNvGrpSpPr/>
+        <p:nvPr/>
+      </p:nvGrpSpPr>
+      <p:grpSpPr>
+        <a:xfrm>
+          <a:off x="0" y="0"/>
+          <a:ext cx="0" cy="0"/>
+          <a:chOff x="0" y="0"/>
+          <a:chExt cx="0" cy="0"/>
+        </a:xfrm>
+      </p:grpSpPr>
+      <p:sp>
+        <p:nvSpPr>
+          <p:cNvPr id="2" name="Slide Image Placeholder 1"/>
+          <p:cNvSpPr>
+            <a:spLocks noGrp="1" noRot="1" noChangeAspect="1"/>
+          </p:cNvSpPr>
+          <p:nvPr>
+            <p:ph type="sldImg"/>
+          </p:nvPr>
+        </p:nvSpPr>
+        <p:spPr/>
+      </p:sp>
+      <p:sp>
+        <p:nvSpPr>
+          <p:cNvPr id="3" name="Notes Placeholder 2"/>
+          <p:cNvSpPr>
+            <a:spLocks noGrp="1"/>
+          </p:cNvSpPr>
+          <p:nvPr>
+            <p:ph type="body" idx="1"/>
+          </p:nvPr>
+        </p:nvSpPr>
+        <p:spPr/>
+        <p:txBody>
+          <a:bodyPr/>
+          <a:lstStyle/>
+          <a:p>
+            <a:r>
+              <a:rPr lang="en-US" dirty="0"/>
+              <a:t/>
+            </a:r>
+            <a:endParaRPr lang="en-US" dirty="0"/>
+          </a:p>
+        </p:txBody>
+      </p:sp>
+      <p:sp>
+        <p:nvSpPr>
+          <p:cNvPr id="4" name="Slide Number Placeholder 3"/>
+          <p:cNvSpPr>
+            <a:spLocks noGrp="1"/>
+          </p:cNvSpPr>
+          <p:nvPr>
+            <p:ph type="sldNum" sz="quarter" idx="10"/>
+          </p:nvPr>
+        </p:nvSpPr>
+        <p:spPr/>
+        <p:txBody>
+          <a:bodyPr/>
+          <a:lstStyle/>
+          <a:p>
+            <a:fld id="{F7021451-1387-4CA6-816F-3879F97B5CBC}" type="slidenum">
+              <a:rPr lang="en-US"/>
+              <a:t>12</a:t>
             </a:fld>
             <a:endParaRPr lang="en-US"/>
           </a:p>
@@ -1787,7 +2054,117 @@
         </p:nvSpPr>
         <p:spPr>
           <a:xfrm>
-            <a:off x="406301" y="1223963"/>
+            <a:off x="406301" y="4434929"/>
+            <a:ext cx="8498026" cy="213271"/>
+          </a:xfrm>
+          <a:prstGeom prst="rect">
+            <a:avLst/>
+          </a:prstGeom>
+          <a:noFill/>
+          <a:ln/>
+        </p:spPr>
+        <p:txBody>
+          <a:bodyPr wrap="square" lIns="0" tIns="0" rIns="0" bIns="0" rtlCol="0" anchor="t"/>
+          <a:lstStyle/>
+          <a:p>
+            <a:pPr algn="l" indent="0" marL="0">
+              <a:lnSpc>
+                <a:spcPts val="1680"/>
+              </a:lnSpc>
+              <a:spcBef>
+                <a:spcPts val="300"/>
+              </a:spcBef>
+              <a:spcAft>
+                <a:spcPts val="300"/>
+              </a:spcAft>
+              <a:buNone/>
+            </a:pPr>
+            <a:r>
+              <a:rPr lang="en-US" sz="1200" dirty="0">
+                <a:solidFill>
+                  <a:srgbClr val="1A1A1A"/>
+                </a:solidFill>
+                <a:latin typeface="Georgia" pitchFamily="34" charset="0"/>
+                <a:ea typeface="Georgia" pitchFamily="34" charset="-122"/>
+                <a:cs typeface="Georgia" pitchFamily="34" charset="-120"/>
+              </a:rPr>
+              <a:t>Senior ·  · IKS Curriculum</a:t>
+            </a:r>
+            <a:endParaRPr lang="en-US" sz="1200" dirty="0"/>
+          </a:p>
+        </p:txBody>
+      </p:sp>
+    </p:spTree>
+  </p:cSld>
+  <p:clrMapOvr>
+    <a:masterClrMapping/>
+  </p:clrMapOvr>
+</p:sld>
+</file>
+
+<file path=ppt/slides/slide10.xml><?xml version="1.0" encoding="utf-8"?>
+<p:sld xmlns:a="http://schemas.openxmlformats.org/drawingml/2006/main" xmlns:r="http://schemas.openxmlformats.org/officeDocument/2006/relationships" xmlns:p="http://schemas.openxmlformats.org/presentationml/2006/main">
+  <p:cSld name="Slide 10">
+    <p:bg>
+      <p:bgPr>
+        <a:solidFill>
+          <a:srgbClr val="FAF7F2"/>
+        </a:solidFill>
+      </p:bgPr>
+    </p:bg>
+    <p:spTree>
+      <p:nvGrpSpPr>
+        <p:cNvPr id="1" name=""/>
+        <p:cNvGrpSpPr/>
+        <p:nvPr/>
+      </p:nvGrpSpPr>
+      <p:grpSpPr>
+        <a:xfrm>
+          <a:off x="0" y="0"/>
+          <a:ext cx="0" cy="0"/>
+          <a:chOff x="0" y="0"/>
+          <a:chExt cx="0" cy="0"/>
+        </a:xfrm>
+      </p:grpSpPr>
+      <p:sp>
+        <p:nvSpPr>
+          <p:cNvPr id="2" name="Text 0"/>
+          <p:cNvSpPr/>
+          <p:nvPr/>
+        </p:nvSpPr>
+        <p:spPr>
+          <a:xfrm>
+            <a:off x="0" y="0"/>
+            <a:ext cx="9144000" cy="101501"/>
+          </a:xfrm>
+          <a:prstGeom prst="rect">
+            <a:avLst/>
+          </a:prstGeom>
+          <a:solidFill>
+            <a:srgbClr val="5D1D2E"/>
+          </a:solidFill>
+          <a:ln/>
+        </p:spPr>
+        <p:txBody>
+          <a:bodyPr wrap="square" rtlCol="0" anchor="ctr"/>
+          <a:lstStyle/>
+          <a:p>
+            <a:pPr indent="0" marL="0">
+              <a:buNone/>
+            </a:pPr>
+            <a:endParaRPr lang="en-US" dirty="0"/>
+          </a:p>
+        </p:txBody>
+      </p:sp>
+      <p:sp>
+        <p:nvSpPr>
+          <p:cNvPr id="3" name="Text 1"/>
+          <p:cNvSpPr/>
+          <p:nvPr/>
+        </p:nvSpPr>
+        <p:spPr>
+          <a:xfrm>
+            <a:off x="406301" y="457051"/>
             <a:ext cx="8498026" cy="274290"/>
           </a:xfrm>
           <a:prstGeom prst="rect">
@@ -1821,7 +2198,7 @@
                 <a:ea typeface="Times New Roman" pitchFamily="34" charset="-122"/>
                 <a:cs typeface="Times New Roman" pitchFamily="34" charset="-120"/>
               </a:rPr>
-              <a:t>Learning objective</a:t>
+              <a:t>Homework</a:t>
             </a:r>
             <a:endParaRPr lang="en-US" sz="1800" dirty="0"/>
           </a:p>
@@ -1829,14 +2206,14 @@
       </p:sp>
       <p:sp>
         <p:nvSpPr>
-          <p:cNvPr id="6" name="Text 4"/>
+          <p:cNvPr id="4" name="Text 2"/>
           <p:cNvSpPr/>
           <p:nvPr/>
         </p:nvSpPr>
         <p:spPr>
           <a:xfrm>
-            <a:off x="406301" y="1637854"/>
-            <a:ext cx="8498026" cy="213271"/>
+            <a:off x="634901" y="883593"/>
+            <a:ext cx="8102798" cy="281880"/>
           </a:xfrm>
           <a:prstGeom prst="rect">
             <a:avLst/>
@@ -1848,6 +2225,52 @@
           <a:bodyPr wrap="square" lIns="0" tIns="0" rIns="0" bIns="0" rtlCol="0" anchor="t"/>
           <a:lstStyle/>
           <a:p>
+            <a:pPr algn="l" marL="342900" indent="-342900">
+              <a:lnSpc>
+                <a:spcPts val="1620"/>
+              </a:lnSpc>
+              <a:spcAft>
+                <a:spcPts val="300"/>
+              </a:spcAft>
+              <a:buSzPct val="100000"/>
+              <a:buChar char="•"/>
+            </a:pPr>
+            <a:r>
+              <a:rPr lang="en-US" sz="1200" dirty="0">
+                <a:solidFill>
+                  <a:srgbClr val="1A1A1A"/>
+                </a:solidFill>
+                <a:latin typeface="Georgia" pitchFamily="34" charset="0"/>
+                <a:ea typeface="Georgia" pitchFamily="34" charset="-122"/>
+                <a:cs typeface="Georgia" pitchFamily="34" charset="-120"/>
+              </a:rPr>
+              <a:t>Draft 1–2 more paragraphs at home. Bring everything tomorrow.</a:t>
+            </a:r>
+            <a:endParaRPr lang="en-US" sz="1200" dirty="0"/>
+          </a:p>
+        </p:txBody>
+      </p:sp>
+      <p:sp>
+        <p:nvSpPr>
+          <p:cNvPr id="5" name="Text 3"/>
+          <p:cNvSpPr/>
+          <p:nvPr/>
+        </p:nvSpPr>
+        <p:spPr>
+          <a:xfrm>
+            <a:off x="406301" y="4434929"/>
+            <a:ext cx="8498026" cy="213271"/>
+          </a:xfrm>
+          <a:prstGeom prst="rect">
+            <a:avLst/>
+          </a:prstGeom>
+          <a:noFill/>
+          <a:ln/>
+        </p:spPr>
+        <p:txBody>
+          <a:bodyPr wrap="square" lIns="0" tIns="0" rIns="0" bIns="0" rtlCol="0" anchor="t"/>
+          <a:lstStyle/>
+          <a:p>
             <a:pPr algn="l" indent="0" marL="0">
               <a:lnSpc>
                 <a:spcPts val="1680"/>
@@ -1869,15 +2292,463 @@
                 <a:ea typeface="Georgia" pitchFamily="34" charset="-122"/>
                 <a:cs typeface="Georgia" pitchFamily="34" charset="-120"/>
               </a:rPr>
-              <a:t>Students choose a focused paper topic, draft a one-paragraph thesis, and produce a working outline.</a:t>
+              <a:t>Senior ·  · IKS Curriculum</a:t>
             </a:r>
             <a:endParaRPr lang="en-US" sz="1200" dirty="0"/>
           </a:p>
         </p:txBody>
       </p:sp>
-      <p:sp>
-        <p:nvSpPr>
-          <p:cNvPr id="7" name="Text 5"/>
+    </p:spTree>
+  </p:cSld>
+  <p:clrMapOvr>
+    <a:masterClrMapping/>
+  </p:clrMapOvr>
+</p:sld>
+</file>
+
+<file path=ppt/slides/slide11.xml><?xml version="1.0" encoding="utf-8"?>
+<p:sld xmlns:a="http://schemas.openxmlformats.org/drawingml/2006/main" xmlns:r="http://schemas.openxmlformats.org/officeDocument/2006/relationships" xmlns:p="http://schemas.openxmlformats.org/presentationml/2006/main">
+  <p:cSld name="Slide 11">
+    <p:bg>
+      <p:bgPr>
+        <a:solidFill>
+          <a:srgbClr val="FAF7F2"/>
+        </a:solidFill>
+      </p:bgPr>
+    </p:bg>
+    <p:spTree>
+      <p:nvGrpSpPr>
+        <p:cNvPr id="1" name=""/>
+        <p:cNvGrpSpPr/>
+        <p:nvPr/>
+      </p:nvGrpSpPr>
+      <p:grpSpPr>
+        <a:xfrm>
+          <a:off x="0" y="0"/>
+          <a:ext cx="0" cy="0"/>
+          <a:chOff x="0" y="0"/>
+          <a:chExt cx="0" cy="0"/>
+        </a:xfrm>
+      </p:grpSpPr>
+      <p:sp>
+        <p:nvSpPr>
+          <p:cNvPr id="2" name="Text 0"/>
+          <p:cNvSpPr/>
+          <p:nvPr/>
+        </p:nvSpPr>
+        <p:spPr>
+          <a:xfrm>
+            <a:off x="0" y="0"/>
+            <a:ext cx="9144000" cy="101501"/>
+          </a:xfrm>
+          <a:prstGeom prst="rect">
+            <a:avLst/>
+          </a:prstGeom>
+          <a:solidFill>
+            <a:srgbClr val="5D1D2E"/>
+          </a:solidFill>
+          <a:ln/>
+        </p:spPr>
+        <p:txBody>
+          <a:bodyPr wrap="square" rtlCol="0" anchor="ctr"/>
+          <a:lstStyle/>
+          <a:p>
+            <a:pPr indent="0" marL="0">
+              <a:buNone/>
+            </a:pPr>
+            <a:endParaRPr lang="en-US" dirty="0"/>
+          </a:p>
+        </p:txBody>
+      </p:sp>
+      <p:sp>
+        <p:nvSpPr>
+          <p:cNvPr id="3" name="Text 1"/>
+          <p:cNvSpPr/>
+          <p:nvPr/>
+        </p:nvSpPr>
+        <p:spPr>
+          <a:xfrm>
+            <a:off x="406301" y="457051"/>
+            <a:ext cx="8498026" cy="274290"/>
+          </a:xfrm>
+          <a:prstGeom prst="rect">
+            <a:avLst/>
+          </a:prstGeom>
+          <a:noFill/>
+          <a:ln/>
+        </p:spPr>
+        <p:txBody>
+          <a:bodyPr wrap="square" lIns="0" tIns="0" rIns="0" bIns="0" rtlCol="0" anchor="t"/>
+          <a:lstStyle/>
+          <a:p>
+            <a:pPr algn="l" indent="0" marL="0">
+              <a:lnSpc>
+                <a:spcPts val="2160"/>
+              </a:lnSpc>
+              <a:spcBef>
+                <a:spcPts val="600"/>
+              </a:spcBef>
+              <a:spcAft>
+                <a:spcPts val="800"/>
+              </a:spcAft>
+              <a:buNone/>
+            </a:pPr>
+            <a:r>
+              <a:rPr lang="en-US" sz="1800" b="1" dirty="0">
+                <a:solidFill>
+                  <a:srgbClr val="997929"/>
+                </a:solidFill>
+                <a:latin typeface="Times New Roman" pitchFamily="34" charset="0"/>
+                <a:ea typeface="Times New Roman" pitchFamily="34" charset="-122"/>
+                <a:cs typeface="Times New Roman" pitchFamily="34" charset="-120"/>
+              </a:rPr>
+              <a:t>Differentiation</a:t>
+            </a:r>
+            <a:endParaRPr lang="en-US" sz="1800" dirty="0"/>
+          </a:p>
+        </p:txBody>
+      </p:sp>
+      <p:sp>
+        <p:nvSpPr>
+          <p:cNvPr id="4" name="Text 2"/>
+          <p:cNvSpPr/>
+          <p:nvPr/>
+        </p:nvSpPr>
+        <p:spPr>
+          <a:xfrm>
+            <a:off x="634901" y="883593"/>
+            <a:ext cx="8102798" cy="731341"/>
+          </a:xfrm>
+          <a:prstGeom prst="rect">
+            <a:avLst/>
+          </a:prstGeom>
+          <a:noFill/>
+          <a:ln/>
+        </p:spPr>
+        <p:txBody>
+          <a:bodyPr wrap="square" lIns="0" tIns="0" rIns="0" bIns="0" rtlCol="0" anchor="t"/>
+          <a:lstStyle/>
+          <a:p>
+            <a:pPr algn="l" marL="342900" indent="-342900">
+              <a:lnSpc>
+                <a:spcPts val="1620"/>
+              </a:lnSpc>
+              <a:spcAft>
+                <a:spcPts val="300"/>
+              </a:spcAft>
+              <a:buSzPct val="100000"/>
+              <a:buChar char="•"/>
+            </a:pPr>
+            <a:r>
+              <a:rPr lang="en-US" sz="1200" b="1" dirty="0">
+                <a:solidFill>
+                  <a:srgbClr val="1A1A1A"/>
+                </a:solidFill>
+                <a:latin typeface="Georgia" pitchFamily="34" charset="0"/>
+                <a:ea typeface="Georgia" pitchFamily="34" charset="-122"/>
+                <a:cs typeface="Georgia" pitchFamily="34" charset="-120"/>
+              </a:rPr>
+              <a:t>Tier up:</a:t>
+            </a:r>
+            <a:pPr algn="l" indent="0" marL="0">
+              <a:lnSpc>
+                <a:spcPts val="1620"/>
+              </a:lnSpc>
+              <a:spcAft>
+                <a:spcPts val="300"/>
+              </a:spcAft>
+              <a:buNone/>
+            </a:pPr>
+            <a:r>
+              <a:rPr lang="en-US" sz="1200" dirty="0">
+                <a:solidFill>
+                  <a:srgbClr val="1A1A1A"/>
+                </a:solidFill>
+                <a:latin typeface="Georgia" pitchFamily="34" charset="0"/>
+                <a:ea typeface="Georgia" pitchFamily="34" charset="-122"/>
+                <a:cs typeface="Georgia" pitchFamily="34" charset="-120"/>
+              </a:rPr>
+              <a:t> Add a 4th source — a contemporary academic article (search Google Scholar).</a:t>
+            </a:r>
+            <a:endParaRPr lang="en-US" sz="1200" dirty="0"/>
+          </a:p>
+          <a:p>
+            <a:pPr algn="l" marL="342900" indent="-342900">
+              <a:lnSpc>
+                <a:spcPts val="1620"/>
+              </a:lnSpc>
+              <a:spcAft>
+                <a:spcPts val="300"/>
+              </a:spcAft>
+              <a:buSzPct val="100000"/>
+              <a:buChar char="•"/>
+            </a:pPr>
+            <a:r>
+              <a:rPr lang="en-US" sz="1200" b="1" dirty="0">
+                <a:solidFill>
+                  <a:srgbClr val="1A1A1A"/>
+                </a:solidFill>
+                <a:latin typeface="Georgia" pitchFamily="34" charset="0"/>
+                <a:ea typeface="Georgia" pitchFamily="34" charset="-122"/>
+                <a:cs typeface="Georgia" pitchFamily="34" charset="-120"/>
+              </a:rPr>
+              <a:t>Tier down:</a:t>
+            </a:r>
+            <a:pPr algn="l" indent="0" marL="0">
+              <a:lnSpc>
+                <a:spcPts val="1620"/>
+              </a:lnSpc>
+              <a:spcAft>
+                <a:spcPts val="300"/>
+              </a:spcAft>
+              <a:buNone/>
+            </a:pPr>
+            <a:r>
+              <a:rPr lang="en-US" sz="1200" dirty="0">
+                <a:solidFill>
+                  <a:srgbClr val="1A1A1A"/>
+                </a:solidFill>
+                <a:latin typeface="Georgia" pitchFamily="34" charset="0"/>
+                <a:ea typeface="Georgia" pitchFamily="34" charset="-122"/>
+                <a:cs typeface="Georgia" pitchFamily="34" charset="-120"/>
+              </a:rPr>
+              <a:t> Topic can be narrow ("a comparison of one Sāṅkhya tanmātra concept with the modern five-senses model"). Narrower is fine.</a:t>
+            </a:r>
+            <a:endParaRPr lang="en-US" sz="1200" dirty="0"/>
+          </a:p>
+        </p:txBody>
+      </p:sp>
+      <p:sp>
+        <p:nvSpPr>
+          <p:cNvPr id="5" name="Text 3"/>
+          <p:cNvSpPr/>
+          <p:nvPr/>
+        </p:nvSpPr>
+        <p:spPr>
+          <a:xfrm>
+            <a:off x="406301" y="4434929"/>
+            <a:ext cx="8498026" cy="213271"/>
+          </a:xfrm>
+          <a:prstGeom prst="rect">
+            <a:avLst/>
+          </a:prstGeom>
+          <a:noFill/>
+          <a:ln/>
+        </p:spPr>
+        <p:txBody>
+          <a:bodyPr wrap="square" lIns="0" tIns="0" rIns="0" bIns="0" rtlCol="0" anchor="t"/>
+          <a:lstStyle/>
+          <a:p>
+            <a:pPr algn="l" indent="0" marL="0">
+              <a:lnSpc>
+                <a:spcPts val="1680"/>
+              </a:lnSpc>
+              <a:spcBef>
+                <a:spcPts val="300"/>
+              </a:spcBef>
+              <a:spcAft>
+                <a:spcPts val="300"/>
+              </a:spcAft>
+              <a:buNone/>
+            </a:pPr>
+            <a:r>
+              <a:rPr lang="en-US" sz="1200" dirty="0">
+                <a:solidFill>
+                  <a:srgbClr val="1A1A1A"/>
+                </a:solidFill>
+                <a:latin typeface="Georgia" pitchFamily="34" charset="0"/>
+                <a:ea typeface="Georgia" pitchFamily="34" charset="-122"/>
+                <a:cs typeface="Georgia" pitchFamily="34" charset="-120"/>
+              </a:rPr>
+              <a:t>Senior ·  · IKS Curriculum</a:t>
+            </a:r>
+            <a:endParaRPr lang="en-US" sz="1200" dirty="0"/>
+          </a:p>
+        </p:txBody>
+      </p:sp>
+    </p:spTree>
+  </p:cSld>
+  <p:clrMapOvr>
+    <a:masterClrMapping/>
+  </p:clrMapOvr>
+</p:sld>
+</file>
+
+<file path=ppt/slides/slide12.xml><?xml version="1.0" encoding="utf-8"?>
+<p:sld xmlns:a="http://schemas.openxmlformats.org/drawingml/2006/main" xmlns:r="http://schemas.openxmlformats.org/officeDocument/2006/relationships" xmlns:p="http://schemas.openxmlformats.org/presentationml/2006/main">
+  <p:cSld name="Slide 12">
+    <p:bg>
+      <p:bgPr>
+        <a:solidFill>
+          <a:srgbClr val="FAF7F2"/>
+        </a:solidFill>
+      </p:bgPr>
+    </p:bg>
+    <p:spTree>
+      <p:nvGrpSpPr>
+        <p:cNvPr id="1" name=""/>
+        <p:cNvGrpSpPr/>
+        <p:nvPr/>
+      </p:nvGrpSpPr>
+      <p:grpSpPr>
+        <a:xfrm>
+          <a:off x="0" y="0"/>
+          <a:ext cx="0" cy="0"/>
+          <a:chOff x="0" y="0"/>
+          <a:chExt cx="0" cy="0"/>
+        </a:xfrm>
+      </p:grpSpPr>
+      <p:sp>
+        <p:nvSpPr>
+          <p:cNvPr id="2" name="Text 0"/>
+          <p:cNvSpPr/>
+          <p:nvPr/>
+        </p:nvSpPr>
+        <p:spPr>
+          <a:xfrm>
+            <a:off x="0" y="0"/>
+            <a:ext cx="9144000" cy="101501"/>
+          </a:xfrm>
+          <a:prstGeom prst="rect">
+            <a:avLst/>
+          </a:prstGeom>
+          <a:solidFill>
+            <a:srgbClr val="5D1D2E"/>
+          </a:solidFill>
+          <a:ln/>
+        </p:spPr>
+        <p:txBody>
+          <a:bodyPr wrap="square" rtlCol="0" anchor="ctr"/>
+          <a:lstStyle/>
+          <a:p>
+            <a:pPr indent="0" marL="0">
+              <a:buNone/>
+            </a:pPr>
+            <a:endParaRPr lang="en-US" dirty="0"/>
+          </a:p>
+        </p:txBody>
+      </p:sp>
+      <p:sp>
+        <p:nvSpPr>
+          <p:cNvPr id="3" name="Text 1"/>
+          <p:cNvSpPr/>
+          <p:nvPr/>
+        </p:nvSpPr>
+        <p:spPr>
+          <a:xfrm>
+            <a:off x="406301" y="457051"/>
+            <a:ext cx="8498026" cy="274290"/>
+          </a:xfrm>
+          <a:prstGeom prst="rect">
+            <a:avLst/>
+          </a:prstGeom>
+          <a:noFill/>
+          <a:ln/>
+        </p:spPr>
+        <p:txBody>
+          <a:bodyPr wrap="square" lIns="0" tIns="0" rIns="0" bIns="0" rtlCol="0" anchor="t"/>
+          <a:lstStyle/>
+          <a:p>
+            <a:pPr algn="l" indent="0" marL="0">
+              <a:lnSpc>
+                <a:spcPts val="2160"/>
+              </a:lnSpc>
+              <a:spcBef>
+                <a:spcPts val="600"/>
+              </a:spcBef>
+              <a:spcAft>
+                <a:spcPts val="800"/>
+              </a:spcAft>
+              <a:buNone/>
+            </a:pPr>
+            <a:r>
+              <a:rPr lang="en-US" sz="1800" b="1" dirty="0">
+                <a:solidFill>
+                  <a:srgbClr val="997929"/>
+                </a:solidFill>
+                <a:latin typeface="Times New Roman" pitchFamily="34" charset="0"/>
+                <a:ea typeface="Times New Roman" pitchFamily="34" charset="-122"/>
+                <a:cs typeface="Times New Roman" pitchFamily="34" charset="-120"/>
+              </a:rPr>
+              <a:t>Teacher notes</a:t>
+            </a:r>
+            <a:endParaRPr lang="en-US" sz="1800" dirty="0"/>
+          </a:p>
+        </p:txBody>
+      </p:sp>
+      <p:sp>
+        <p:nvSpPr>
+          <p:cNvPr id="4" name="Text 2"/>
+          <p:cNvSpPr/>
+          <p:nvPr/>
+        </p:nvSpPr>
+        <p:spPr>
+          <a:xfrm>
+            <a:off x="634901" y="883593"/>
+            <a:ext cx="8102798" cy="731341"/>
+          </a:xfrm>
+          <a:prstGeom prst="rect">
+            <a:avLst/>
+          </a:prstGeom>
+          <a:noFill/>
+          <a:ln/>
+        </p:spPr>
+        <p:txBody>
+          <a:bodyPr wrap="square" lIns="0" tIns="0" rIns="0" bIns="0" rtlCol="0" anchor="t"/>
+          <a:lstStyle/>
+          <a:p>
+            <a:pPr algn="l" marL="342900" indent="-342900">
+              <a:lnSpc>
+                <a:spcPts val="1620"/>
+              </a:lnSpc>
+              <a:spcAft>
+                <a:spcPts val="300"/>
+              </a:spcAft>
+              <a:buSzPct val="100000"/>
+              <a:buChar char="•"/>
+            </a:pPr>
+            <a:r>
+              <a:rPr lang="en-US" sz="1200" dirty="0">
+                <a:solidFill>
+                  <a:srgbClr val="1A1A1A"/>
+                </a:solidFill>
+                <a:latin typeface="Georgia" pitchFamily="34" charset="0"/>
+                <a:ea typeface="Georgia" pitchFamily="34" charset="-122"/>
+                <a:cs typeface="Georgia" pitchFamily="34" charset="-120"/>
+              </a:rPr>
+              <a:t>Common pitfall: too-broad topic. Push for specificity early.</a:t>
+            </a:r>
+            <a:endParaRPr lang="en-US" sz="1200" dirty="0"/>
+          </a:p>
+          <a:p>
+            <a:pPr algn="l" marL="342900" indent="-342900">
+              <a:lnSpc>
+                <a:spcPts val="1620"/>
+              </a:lnSpc>
+              <a:spcAft>
+                <a:spcPts val="300"/>
+              </a:spcAft>
+              <a:buSzPct val="100000"/>
+              <a:buChar char="•"/>
+            </a:pPr>
+            <a:r>
+              <a:rPr lang="en-US" sz="1200" dirty="0">
+                <a:solidFill>
+                  <a:srgbClr val="1A1A1A"/>
+                </a:solidFill>
+                <a:latin typeface="Georgia" pitchFamily="34" charset="0"/>
+                <a:ea typeface="Georgia" pitchFamily="34" charset="-122"/>
+                <a:cs typeface="Georgia" pitchFamily="34" charset="-120"/>
+              </a:rPr>
+              <a:t>A weak thesis sounds like "Indian science is interesting." A strong thesis sounds like "The Sāṅkhya tanmātra–indriya symmetry offers a model that 19th-century European psychophysics independently rediscovered."</a:t>
+            </a:r>
+            <a:endParaRPr lang="en-US" sz="1200" dirty="0"/>
+          </a:p>
+        </p:txBody>
+      </p:sp>
+      <p:sp>
+        <p:nvSpPr>
+          <p:cNvPr id="5" name="Text 3"/>
           <p:cNvSpPr/>
           <p:nvPr/>
         </p:nvSpPr>
@@ -2027,7 +2898,7 @@
                 <a:ea typeface="Times New Roman" pitchFamily="34" charset="-122"/>
                 <a:cs typeface="Times New Roman" pitchFamily="34" charset="-120"/>
               </a:rPr>
-              <a:t>Materials</a:t>
+              <a:t>Learning objective</a:t>
             </a:r>
             <a:endParaRPr lang="en-US" sz="1800" dirty="0"/>
           </a:p>
@@ -2042,7 +2913,7 @@
         <p:spPr>
           <a:xfrm>
             <a:off x="406301" y="870942"/>
-            <a:ext cx="8498026" cy="436066"/>
+            <a:ext cx="8498026" cy="213271"/>
           </a:xfrm>
           <a:prstGeom prst="rect">
             <a:avLst/>
@@ -2075,99 +2946,7 @@
                 <a:ea typeface="Georgia" pitchFamily="34" charset="-122"/>
                 <a:cs typeface="Georgia" pitchFamily="34" charset="-120"/>
               </a:rPr>
-              <a:t>– Project brief (</a:t>
-            </a:r>
-            <a:pPr algn="l" indent="0" marL="0">
-              <a:lnSpc>
-                <a:spcPts val="1680"/>
-              </a:lnSpc>
-              <a:spcBef>
-                <a:spcPts val="300"/>
-              </a:spcBef>
-              <a:spcAft>
-                <a:spcPts val="300"/>
-              </a:spcAft>
-              <a:buNone/>
-            </a:pPr>
-            <a:r>
-              <a:rPr lang="en-US" sz="1200" dirty="0">
-                <a:solidFill>
-                  <a:srgbClr val="1A1A1A"/>
-                </a:solidFill>
-                <a:latin typeface="Georgia" pitchFamily="34" charset="0"/>
-                <a:ea typeface="Georgia" pitchFamily="34" charset="-122"/>
-                <a:cs typeface="Georgia" pitchFamily="34" charset="-120"/>
-              </a:rPr>
-              <a:t>assessments/project-brief.md</a:t>
-            </a:r>
-            <a:pPr algn="l" indent="0" marL="0">
-              <a:lnSpc>
-                <a:spcPts val="1680"/>
-              </a:lnSpc>
-              <a:spcBef>
-                <a:spcPts val="300"/>
-              </a:spcBef>
-              <a:spcAft>
-                <a:spcPts val="300"/>
-              </a:spcAft>
-              <a:buNone/>
-            </a:pPr>
-            <a:r>
-              <a:rPr lang="en-US" sz="1200" dirty="0">
-                <a:solidFill>
-                  <a:srgbClr val="1A1A1A"/>
-                </a:solidFill>
-                <a:latin typeface="Georgia" pitchFamily="34" charset="0"/>
-                <a:ea typeface="Georgia" pitchFamily="34" charset="-122"/>
-                <a:cs typeface="Georgia" pitchFamily="34" charset="-120"/>
-              </a:rPr>
-              <a:t>) – Rubric (</a:t>
-            </a:r>
-            <a:pPr algn="l" indent="0" marL="0">
-              <a:lnSpc>
-                <a:spcPts val="1680"/>
-              </a:lnSpc>
-              <a:spcBef>
-                <a:spcPts val="300"/>
-              </a:spcBef>
-              <a:spcAft>
-                <a:spcPts val="300"/>
-              </a:spcAft>
-              <a:buNone/>
-            </a:pPr>
-            <a:r>
-              <a:rPr lang="en-US" sz="1200" dirty="0">
-                <a:solidFill>
-                  <a:srgbClr val="1A1A1A"/>
-                </a:solidFill>
-                <a:latin typeface="Georgia" pitchFamily="34" charset="0"/>
-                <a:ea typeface="Georgia" pitchFamily="34" charset="-122"/>
-                <a:cs typeface="Georgia" pitchFamily="34" charset="-120"/>
-              </a:rPr>
-              <a:t>assessments/rubric.md</a:t>
-            </a:r>
-            <a:pPr algn="l" indent="0" marL="0">
-              <a:lnSpc>
-                <a:spcPts val="1680"/>
-              </a:lnSpc>
-              <a:spcBef>
-                <a:spcPts val="300"/>
-              </a:spcBef>
-              <a:spcAft>
-                <a:spcPts val="300"/>
-              </a:spcAft>
-              <a:buNone/>
-            </a:pPr>
-            <a:r>
-              <a:rPr lang="en-US" sz="1200" dirty="0">
-                <a:solidFill>
-                  <a:srgbClr val="1A1A1A"/>
-                </a:solidFill>
-                <a:latin typeface="Georgia" pitchFamily="34" charset="0"/>
-                <a:ea typeface="Georgia" pitchFamily="34" charset="-122"/>
-                <a:cs typeface="Georgia" pitchFamily="34" charset="-120"/>
-              </a:rPr>
-              <a:t>) – Laptop or notebook for drafting</a:t>
+              <a:t>Students choose a focused paper topic, draft a one-paragraph thesis, and produce a working outline.</a:t>
             </a:r>
             <a:endParaRPr lang="en-US" sz="1200" dirty="0"/>
           </a:p>
@@ -2325,7 +3104,7 @@
                 <a:ea typeface="Times New Roman" pitchFamily="34" charset="-122"/>
                 <a:cs typeface="Times New Roman" pitchFamily="34" charset="-120"/>
               </a:rPr>
-              <a:t>Flow</a:t>
+              <a:t>Materials</a:t>
             </a:r>
             <a:endParaRPr lang="en-US" sz="1800" dirty="0"/>
           </a:p>
@@ -2334,6 +3113,180 @@
       <p:sp>
         <p:nvSpPr>
           <p:cNvPr id="4" name="Text 2"/>
+          <p:cNvSpPr/>
+          <p:nvPr/>
+        </p:nvSpPr>
+        <p:spPr>
+          <a:xfrm>
+            <a:off x="634901" y="883593"/>
+            <a:ext cx="8102798" cy="807541"/>
+          </a:xfrm>
+          <a:prstGeom prst="rect">
+            <a:avLst/>
+          </a:prstGeom>
+          <a:noFill/>
+          <a:ln/>
+        </p:spPr>
+        <p:txBody>
+          <a:bodyPr wrap="square" lIns="0" tIns="0" rIns="0" bIns="0" rtlCol="0" anchor="t"/>
+          <a:lstStyle/>
+          <a:p>
+            <a:pPr algn="l" marL="342900" indent="-342900">
+              <a:lnSpc>
+                <a:spcPts val="1620"/>
+              </a:lnSpc>
+              <a:spcAft>
+                <a:spcPts val="300"/>
+              </a:spcAft>
+              <a:buSzPct val="100000"/>
+              <a:buChar char="•"/>
+            </a:pPr>
+            <a:r>
+              <a:rPr lang="en-US" sz="1200" dirty="0">
+                <a:solidFill>
+                  <a:srgbClr val="1A1A1A"/>
+                </a:solidFill>
+                <a:latin typeface="Georgia" pitchFamily="34" charset="0"/>
+                <a:ea typeface="Georgia" pitchFamily="34" charset="-122"/>
+                <a:cs typeface="Georgia" pitchFamily="34" charset="-120"/>
+              </a:rPr>
+              <a:t>Project brief (</a:t>
+            </a:r>
+            <a:pPr algn="l" indent="0" marL="0">
+              <a:lnSpc>
+                <a:spcPts val="1620"/>
+              </a:lnSpc>
+              <a:spcAft>
+                <a:spcPts val="300"/>
+              </a:spcAft>
+              <a:buNone/>
+            </a:pPr>
+            <a:r>
+              <a:rPr lang="en-US" sz="1200" dirty="0">
+                <a:solidFill>
+                  <a:srgbClr val="1A1A1A"/>
+                </a:solidFill>
+                <a:latin typeface="Georgia" pitchFamily="34" charset="0"/>
+                <a:ea typeface="Georgia" pitchFamily="34" charset="-122"/>
+                <a:cs typeface="Georgia" pitchFamily="34" charset="-120"/>
+              </a:rPr>
+              <a:t>assessments/project-brief.md</a:t>
+            </a:r>
+            <a:pPr algn="l" indent="0" marL="0">
+              <a:lnSpc>
+                <a:spcPts val="1620"/>
+              </a:lnSpc>
+              <a:spcAft>
+                <a:spcPts val="300"/>
+              </a:spcAft>
+              <a:buNone/>
+            </a:pPr>
+            <a:r>
+              <a:rPr lang="en-US" sz="1200" dirty="0">
+                <a:solidFill>
+                  <a:srgbClr val="1A1A1A"/>
+                </a:solidFill>
+                <a:latin typeface="Georgia" pitchFamily="34" charset="0"/>
+                <a:ea typeface="Georgia" pitchFamily="34" charset="-122"/>
+                <a:cs typeface="Georgia" pitchFamily="34" charset="-120"/>
+              </a:rPr>
+              <a:t>)</a:t>
+            </a:r>
+            <a:endParaRPr lang="en-US" sz="1200" dirty="0"/>
+          </a:p>
+          <a:p>
+            <a:pPr algn="l" marL="342900" indent="-342900">
+              <a:lnSpc>
+                <a:spcPts val="1620"/>
+              </a:lnSpc>
+              <a:spcAft>
+                <a:spcPts val="300"/>
+              </a:spcAft>
+              <a:buSzPct val="100000"/>
+              <a:buChar char="•"/>
+            </a:pPr>
+            <a:r>
+              <a:rPr lang="en-US" sz="1200" dirty="0">
+                <a:solidFill>
+                  <a:srgbClr val="1A1A1A"/>
+                </a:solidFill>
+                <a:latin typeface="Georgia" pitchFamily="34" charset="0"/>
+                <a:ea typeface="Georgia" pitchFamily="34" charset="-122"/>
+                <a:cs typeface="Georgia" pitchFamily="34" charset="-120"/>
+              </a:rPr>
+              <a:t>Rubric (</a:t>
+            </a:r>
+            <a:pPr algn="l" indent="0" marL="0">
+              <a:lnSpc>
+                <a:spcPts val="1620"/>
+              </a:lnSpc>
+              <a:spcAft>
+                <a:spcPts val="300"/>
+              </a:spcAft>
+              <a:buNone/>
+            </a:pPr>
+            <a:r>
+              <a:rPr lang="en-US" sz="1200" dirty="0">
+                <a:solidFill>
+                  <a:srgbClr val="1A1A1A"/>
+                </a:solidFill>
+                <a:latin typeface="Georgia" pitchFamily="34" charset="0"/>
+                <a:ea typeface="Georgia" pitchFamily="34" charset="-122"/>
+                <a:cs typeface="Georgia" pitchFamily="34" charset="-120"/>
+              </a:rPr>
+              <a:t>assessments/rubric.md</a:t>
+            </a:r>
+            <a:pPr algn="l" indent="0" marL="0">
+              <a:lnSpc>
+                <a:spcPts val="1620"/>
+              </a:lnSpc>
+              <a:spcAft>
+                <a:spcPts val="300"/>
+              </a:spcAft>
+              <a:buNone/>
+            </a:pPr>
+            <a:r>
+              <a:rPr lang="en-US" sz="1200" dirty="0">
+                <a:solidFill>
+                  <a:srgbClr val="1A1A1A"/>
+                </a:solidFill>
+                <a:latin typeface="Georgia" pitchFamily="34" charset="0"/>
+                <a:ea typeface="Georgia" pitchFamily="34" charset="-122"/>
+                <a:cs typeface="Georgia" pitchFamily="34" charset="-120"/>
+              </a:rPr>
+              <a:t>)</a:t>
+            </a:r>
+            <a:endParaRPr lang="en-US" sz="1200" dirty="0"/>
+          </a:p>
+          <a:p>
+            <a:pPr algn="l" marL="342900" indent="-342900">
+              <a:lnSpc>
+                <a:spcPts val="1620"/>
+              </a:lnSpc>
+              <a:spcAft>
+                <a:spcPts val="300"/>
+              </a:spcAft>
+              <a:buSzPct val="100000"/>
+              <a:buChar char="•"/>
+            </a:pPr>
+            <a:r>
+              <a:rPr lang="en-US" sz="1200" dirty="0">
+                <a:solidFill>
+                  <a:srgbClr val="1A1A1A"/>
+                </a:solidFill>
+                <a:latin typeface="Georgia" pitchFamily="34" charset="0"/>
+                <a:ea typeface="Georgia" pitchFamily="34" charset="-122"/>
+                <a:cs typeface="Georgia" pitchFamily="34" charset="-120"/>
+              </a:rPr>
+              <a:t>Laptop or notebook for drafting</a:t>
+            </a:r>
+            <a:endParaRPr lang="en-US" sz="1200" dirty="0"/>
+          </a:p>
+        </p:txBody>
+      </p:sp>
+      <p:sp>
+        <p:nvSpPr>
+          <p:cNvPr id="5" name="Text 3"/>
           <p:cNvSpPr/>
           <p:nvPr/>
         </p:nvSpPr>
@@ -2483,7 +3436,7 @@
                 <a:ea typeface="Times New Roman" pitchFamily="34" charset="-122"/>
                 <a:cs typeface="Times New Roman" pitchFamily="34" charset="-120"/>
               </a:rPr>
-              <a:t>Warm-up (5 min)</a:t>
+              <a:t>Flow</a:t>
             </a:r>
             <a:endParaRPr lang="en-US" sz="1800" dirty="0"/>
           </a:p>
@@ -2492,146 +3445,6 @@
       <p:sp>
         <p:nvSpPr>
           <p:cNvPr id="4" name="Text 2"/>
-          <p:cNvSpPr/>
-          <p:nvPr/>
-        </p:nvSpPr>
-        <p:spPr>
-          <a:xfrm>
-            <a:off x="406301" y="870942"/>
-            <a:ext cx="8498026" cy="213271"/>
-          </a:xfrm>
-          <a:prstGeom prst="rect">
-            <a:avLst/>
-          </a:prstGeom>
-          <a:noFill/>
-          <a:ln/>
-        </p:spPr>
-        <p:txBody>
-          <a:bodyPr wrap="square" lIns="0" tIns="0" rIns="0" bIns="0" rtlCol="0" anchor="t"/>
-          <a:lstStyle/>
-          <a:p>
-            <a:pPr algn="l" indent="0" marL="0">
-              <a:lnSpc>
-                <a:spcPts val="1680"/>
-              </a:lnSpc>
-              <a:spcBef>
-                <a:spcPts val="300"/>
-              </a:spcBef>
-              <a:spcAft>
-                <a:spcPts val="300"/>
-              </a:spcAft>
-              <a:buNone/>
-            </a:pPr>
-            <a:r>
-              <a:rPr lang="en-US" sz="1200" dirty="0">
-                <a:solidFill>
-                  <a:srgbClr val="1A1A1A"/>
-                </a:solidFill>
-                <a:latin typeface="Georgia" pitchFamily="34" charset="0"/>
-                <a:ea typeface="Georgia" pitchFamily="34" charset="-122"/>
-                <a:cs typeface="Georgia" pitchFamily="34" charset="-120"/>
-              </a:rPr>
-              <a:t>– Hand out the rubric. Read aloud the </a:t>
-            </a:r>
-            <a:pPr algn="l" indent="0" marL="0">
-              <a:lnSpc>
-                <a:spcPts val="1680"/>
-              </a:lnSpc>
-              <a:spcBef>
-                <a:spcPts val="300"/>
-              </a:spcBef>
-              <a:spcAft>
-                <a:spcPts val="300"/>
-              </a:spcAft>
-              <a:buNone/>
-            </a:pPr>
-            <a:r>
-              <a:rPr lang="en-US" sz="1200" i="1" dirty="0">
-                <a:solidFill>
-                  <a:srgbClr val="1A1A1A"/>
-                </a:solidFill>
-                <a:latin typeface="Georgia" pitchFamily="34" charset="0"/>
-                <a:ea typeface="Georgia" pitchFamily="34" charset="-122"/>
-                <a:cs typeface="Georgia" pitchFamily="34" charset="-120"/>
-              </a:rPr>
-              <a:t>thesis</a:t>
-            </a:r>
-            <a:pPr algn="l" indent="0" marL="0">
-              <a:lnSpc>
-                <a:spcPts val="1680"/>
-              </a:lnSpc>
-              <a:spcBef>
-                <a:spcPts val="300"/>
-              </a:spcBef>
-              <a:spcAft>
-                <a:spcPts val="300"/>
-              </a:spcAft>
-              <a:buNone/>
-            </a:pPr>
-            <a:r>
-              <a:rPr lang="en-US" sz="1200" dirty="0">
-                <a:solidFill>
-                  <a:srgbClr val="1A1A1A"/>
-                </a:solidFill>
-                <a:latin typeface="Georgia" pitchFamily="34" charset="0"/>
-                <a:ea typeface="Georgia" pitchFamily="34" charset="-122"/>
-                <a:cs typeface="Georgia" pitchFamily="34" charset="-120"/>
-              </a:rPr>
-              <a:t> and </a:t>
-            </a:r>
-            <a:pPr algn="l" indent="0" marL="0">
-              <a:lnSpc>
-                <a:spcPts val="1680"/>
-              </a:lnSpc>
-              <a:spcBef>
-                <a:spcPts val="300"/>
-              </a:spcBef>
-              <a:spcAft>
-                <a:spcPts val="300"/>
-              </a:spcAft>
-              <a:buNone/>
-            </a:pPr>
-            <a:r>
-              <a:rPr lang="en-US" sz="1200" i="1" dirty="0">
-                <a:solidFill>
-                  <a:srgbClr val="1A1A1A"/>
-                </a:solidFill>
-                <a:latin typeface="Georgia" pitchFamily="34" charset="0"/>
-                <a:ea typeface="Georgia" pitchFamily="34" charset="-122"/>
-                <a:cs typeface="Georgia" pitchFamily="34" charset="-120"/>
-              </a:rPr>
-              <a:t>counter-argument</a:t>
-            </a:r>
-            <a:pPr algn="l" indent="0" marL="0">
-              <a:lnSpc>
-                <a:spcPts val="1680"/>
-              </a:lnSpc>
-              <a:spcBef>
-                <a:spcPts val="300"/>
-              </a:spcBef>
-              <a:spcAft>
-                <a:spcPts val="300"/>
-              </a:spcAft>
-              <a:buNone/>
-            </a:pPr>
-            <a:r>
-              <a:rPr lang="en-US" sz="1200" dirty="0">
-                <a:solidFill>
-                  <a:srgbClr val="1A1A1A"/>
-                </a:solidFill>
-                <a:latin typeface="Georgia" pitchFamily="34" charset="0"/>
-                <a:ea typeface="Georgia" pitchFamily="34" charset="-122"/>
-                <a:cs typeface="Georgia" pitchFamily="34" charset="-120"/>
-              </a:rPr>
-              <a:t> criteria.</a:t>
-            </a:r>
-            <a:endParaRPr lang="en-US" sz="1200" dirty="0"/>
-          </a:p>
-        </p:txBody>
-      </p:sp>
-      <p:sp>
-        <p:nvSpPr>
-          <p:cNvPr id="5" name="Text 3"/>
           <p:cNvSpPr/>
           <p:nvPr/>
         </p:nvSpPr>
@@ -2781,7 +3594,7 @@
                 <a:ea typeface="Times New Roman" pitchFamily="34" charset="-122"/>
                 <a:cs typeface="Times New Roman" pitchFamily="34" charset="-120"/>
               </a:rPr>
-              <a:t>Core: outlining (30 min)</a:t>
+              <a:t>Warm-up (5 min)</a:t>
             </a:r>
             <a:endParaRPr lang="en-US" sz="1800" dirty="0"/>
           </a:p>
@@ -2795,8 +3608,8 @@
         </p:nvSpPr>
         <p:spPr>
           <a:xfrm>
-            <a:off x="406301" y="870942"/>
-            <a:ext cx="8498026" cy="426541"/>
+            <a:off x="634901" y="883593"/>
+            <a:ext cx="8102798" cy="281880"/>
           </a:xfrm>
           <a:prstGeom prst="rect">
             <a:avLst/>
@@ -2808,36 +3621,51 @@
           <a:bodyPr wrap="square" lIns="0" tIns="0" rIns="0" bIns="0" rtlCol="0" anchor="t"/>
           <a:lstStyle/>
           <a:p>
+            <a:pPr algn="l" marL="342900" indent="-342900">
+              <a:lnSpc>
+                <a:spcPts val="1620"/>
+              </a:lnSpc>
+              <a:spcAft>
+                <a:spcPts val="300"/>
+              </a:spcAft>
+              <a:buSzPct val="100000"/>
+              <a:buChar char="•"/>
+            </a:pPr>
+            <a:r>
+              <a:rPr lang="en-US" sz="1200" dirty="0">
+                <a:solidFill>
+                  <a:srgbClr val="1A1A1A"/>
+                </a:solidFill>
+                <a:latin typeface="Georgia" pitchFamily="34" charset="0"/>
+                <a:ea typeface="Georgia" pitchFamily="34" charset="-122"/>
+                <a:cs typeface="Georgia" pitchFamily="34" charset="-120"/>
+              </a:rPr>
+              <a:t>Hand out the rubric. Read aloud the </a:t>
+            </a:r>
             <a:pPr algn="l" indent="0" marL="0">
               <a:lnSpc>
-                <a:spcPts val="1680"/>
-              </a:lnSpc>
-              <a:spcBef>
-                <a:spcPts val="300"/>
-              </a:spcBef>
-              <a:spcAft>
-                <a:spcPts val="300"/>
-              </a:spcAft>
-              <a:buNone/>
-            </a:pPr>
-            <a:r>
-              <a:rPr lang="en-US" sz="1200" b="1" dirty="0">
-                <a:solidFill>
-                  <a:srgbClr val="1A1A1A"/>
-                </a:solidFill>
-                <a:latin typeface="Georgia" pitchFamily="34" charset="0"/>
-                <a:ea typeface="Georgia" pitchFamily="34" charset="-122"/>
-                <a:cs typeface="Georgia" pitchFamily="34" charset="-120"/>
-              </a:rPr>
-              <a:t>Sprint 1 (10 min) — Topic.</a:t>
+                <a:spcPts val="1620"/>
+              </a:lnSpc>
+              <a:spcAft>
+                <a:spcPts val="300"/>
+              </a:spcAft>
+              <a:buNone/>
+            </a:pPr>
+            <a:r>
+              <a:rPr lang="en-US" sz="1200" i="1" dirty="0">
+                <a:solidFill>
+                  <a:srgbClr val="1A1A1A"/>
+                </a:solidFill>
+                <a:latin typeface="Georgia" pitchFamily="34" charset="0"/>
+                <a:ea typeface="Georgia" pitchFamily="34" charset="-122"/>
+                <a:cs typeface="Georgia" pitchFamily="34" charset="-120"/>
+              </a:rPr>
+              <a:t>thesis</a:t>
             </a:r>
             <a:pPr algn="l" indent="0" marL="0">
               <a:lnSpc>
-                <a:spcPts val="1680"/>
-              </a:lnSpc>
-              <a:spcBef>
-                <a:spcPts val="300"/>
-              </a:spcBef>
+                <a:spcPts val="1620"/>
+              </a:lnSpc>
               <a:spcAft>
                 <a:spcPts val="300"/>
               </a:spcAft>
@@ -2852,7 +3680,47 @@
                 <a:ea typeface="Georgia" pitchFamily="34" charset="-122"/>
                 <a:cs typeface="Georgia" pitchFamily="34" charset="-120"/>
               </a:rPr>
-              <a:t> Each student writes: – Working title (1 line) – One-paragraph thesis (3–4 sentences) – 3 sources they'll cite (must include one primary scriptural, one secondary scholarly, one comparative or modern)</a:t>
+              <a:t> and </a:t>
+            </a:r>
+            <a:pPr algn="l" indent="0" marL="0">
+              <a:lnSpc>
+                <a:spcPts val="1620"/>
+              </a:lnSpc>
+              <a:spcAft>
+                <a:spcPts val="300"/>
+              </a:spcAft>
+              <a:buNone/>
+            </a:pPr>
+            <a:r>
+              <a:rPr lang="en-US" sz="1200" i="1" dirty="0">
+                <a:solidFill>
+                  <a:srgbClr val="1A1A1A"/>
+                </a:solidFill>
+                <a:latin typeface="Georgia" pitchFamily="34" charset="0"/>
+                <a:ea typeface="Georgia" pitchFamily="34" charset="-122"/>
+                <a:cs typeface="Georgia" pitchFamily="34" charset="-120"/>
+              </a:rPr>
+              <a:t>counter-argument</a:t>
+            </a:r>
+            <a:pPr algn="l" indent="0" marL="0">
+              <a:lnSpc>
+                <a:spcPts val="1620"/>
+              </a:lnSpc>
+              <a:spcAft>
+                <a:spcPts val="300"/>
+              </a:spcAft>
+              <a:buNone/>
+            </a:pPr>
+            <a:r>
+              <a:rPr lang="en-US" sz="1200" dirty="0">
+                <a:solidFill>
+                  <a:srgbClr val="1A1A1A"/>
+                </a:solidFill>
+                <a:latin typeface="Georgia" pitchFamily="34" charset="0"/>
+                <a:ea typeface="Georgia" pitchFamily="34" charset="-122"/>
+                <a:cs typeface="Georgia" pitchFamily="34" charset="-120"/>
+              </a:rPr>
+              <a:t> criteria.</a:t>
             </a:r>
             <a:endParaRPr lang="en-US" sz="1200" dirty="0"/>
           </a:p>
@@ -2861,219 +3729,6 @@
       <p:sp>
         <p:nvSpPr>
           <p:cNvPr id="5" name="Text 3"/>
-          <p:cNvSpPr/>
-          <p:nvPr/>
-        </p:nvSpPr>
-        <p:spPr>
-          <a:xfrm>
-            <a:off x="406301" y="1373684"/>
-            <a:ext cx="8498026" cy="426541"/>
-          </a:xfrm>
-          <a:prstGeom prst="rect">
-            <a:avLst/>
-          </a:prstGeom>
-          <a:noFill/>
-          <a:ln/>
-        </p:spPr>
-        <p:txBody>
-          <a:bodyPr wrap="square" lIns="0" tIns="0" rIns="0" bIns="0" rtlCol="0" anchor="t"/>
-          <a:lstStyle/>
-          <a:p>
-            <a:pPr algn="l" indent="0" marL="0">
-              <a:lnSpc>
-                <a:spcPts val="1680"/>
-              </a:lnSpc>
-              <a:spcBef>
-                <a:spcPts val="300"/>
-              </a:spcBef>
-              <a:spcAft>
-                <a:spcPts val="300"/>
-              </a:spcAft>
-              <a:buNone/>
-            </a:pPr>
-            <a:r>
-              <a:rPr lang="en-US" sz="1200" dirty="0">
-                <a:solidFill>
-                  <a:srgbClr val="1A1A1A"/>
-                </a:solidFill>
-                <a:latin typeface="Georgia" pitchFamily="34" charset="0"/>
-                <a:ea typeface="Georgia" pitchFamily="34" charset="-122"/>
-                <a:cs typeface="Georgia" pitchFamily="34" charset="-120"/>
-              </a:rPr>
-              <a:t>Teacher rotates: 60 sec per student, single question: </a:t>
-            </a:r>
-            <a:pPr algn="l" indent="0" marL="0">
-              <a:lnSpc>
-                <a:spcPts val="1680"/>
-              </a:lnSpc>
-              <a:spcBef>
-                <a:spcPts val="300"/>
-              </a:spcBef>
-              <a:spcAft>
-                <a:spcPts val="300"/>
-              </a:spcAft>
-              <a:buNone/>
-            </a:pPr>
-            <a:r>
-              <a:rPr lang="en-US" sz="1200" i="1" dirty="0">
-                <a:solidFill>
-                  <a:srgbClr val="1A1A1A"/>
-                </a:solidFill>
-                <a:latin typeface="Georgia" pitchFamily="34" charset="0"/>
-                <a:ea typeface="Georgia" pitchFamily="34" charset="-122"/>
-                <a:cs typeface="Georgia" pitchFamily="34" charset="-120"/>
-              </a:rPr>
-              <a:t>"What's the counter-argument someone could make against your thesis?"</a:t>
-            </a:r>
-            <a:endParaRPr lang="en-US" sz="1200" dirty="0"/>
-          </a:p>
-        </p:txBody>
-      </p:sp>
-      <p:sp>
-        <p:nvSpPr>
-          <p:cNvPr id="6" name="Text 4"/>
-          <p:cNvSpPr/>
-          <p:nvPr/>
-        </p:nvSpPr>
-        <p:spPr>
-          <a:xfrm>
-            <a:off x="406301" y="1876425"/>
-            <a:ext cx="8498026" cy="639812"/>
-          </a:xfrm>
-          <a:prstGeom prst="rect">
-            <a:avLst/>
-          </a:prstGeom>
-          <a:noFill/>
-          <a:ln/>
-        </p:spPr>
-        <p:txBody>
-          <a:bodyPr wrap="square" lIns="0" tIns="0" rIns="0" bIns="0" rtlCol="0" anchor="t"/>
-          <a:lstStyle/>
-          <a:p>
-            <a:pPr algn="l" indent="0" marL="0">
-              <a:lnSpc>
-                <a:spcPts val="1680"/>
-              </a:lnSpc>
-              <a:spcBef>
-                <a:spcPts val="300"/>
-              </a:spcBef>
-              <a:spcAft>
-                <a:spcPts val="300"/>
-              </a:spcAft>
-              <a:buNone/>
-            </a:pPr>
-            <a:r>
-              <a:rPr lang="en-US" sz="1200" b="1" dirty="0">
-                <a:solidFill>
-                  <a:srgbClr val="1A1A1A"/>
-                </a:solidFill>
-                <a:latin typeface="Georgia" pitchFamily="34" charset="0"/>
-                <a:ea typeface="Georgia" pitchFamily="34" charset="-122"/>
-                <a:cs typeface="Georgia" pitchFamily="34" charset="-120"/>
-              </a:rPr>
-              <a:t>Sprint 2 (10 min) — Outline.</a:t>
-            </a:r>
-            <a:pPr algn="l" indent="0" marL="0">
-              <a:lnSpc>
-                <a:spcPts val="1680"/>
-              </a:lnSpc>
-              <a:spcBef>
-                <a:spcPts val="300"/>
-              </a:spcBef>
-              <a:spcAft>
-                <a:spcPts val="300"/>
-              </a:spcAft>
-              <a:buNone/>
-            </a:pPr>
-            <a:r>
-              <a:rPr lang="en-US" sz="1200" dirty="0">
-                <a:solidFill>
-                  <a:srgbClr val="1A1A1A"/>
-                </a:solidFill>
-                <a:latin typeface="Georgia" pitchFamily="34" charset="0"/>
-                <a:ea typeface="Georgia" pitchFamily="34" charset="-122"/>
-                <a:cs typeface="Georgia" pitchFamily="34" charset="-120"/>
-              </a:rPr>
-              <a:t> Each student writes section headings + 1-line sub-points: – Introduction (with thesis statement) – Section 1 (anchor claim + source) – Section 2 (anchor claim + source) – Counter-argument and response – Conclusion</a:t>
-            </a:r>
-            <a:endParaRPr lang="en-US" sz="1200" dirty="0"/>
-          </a:p>
-        </p:txBody>
-      </p:sp>
-      <p:sp>
-        <p:nvSpPr>
-          <p:cNvPr id="7" name="Text 5"/>
-          <p:cNvSpPr/>
-          <p:nvPr/>
-        </p:nvSpPr>
-        <p:spPr>
-          <a:xfrm>
-            <a:off x="406301" y="2592437"/>
-            <a:ext cx="8498026" cy="213271"/>
-          </a:xfrm>
-          <a:prstGeom prst="rect">
-            <a:avLst/>
-          </a:prstGeom>
-          <a:noFill/>
-          <a:ln/>
-        </p:spPr>
-        <p:txBody>
-          <a:bodyPr wrap="square" lIns="0" tIns="0" rIns="0" bIns="0" rtlCol="0" anchor="t"/>
-          <a:lstStyle/>
-          <a:p>
-            <a:pPr algn="l" indent="0" marL="0">
-              <a:lnSpc>
-                <a:spcPts val="1680"/>
-              </a:lnSpc>
-              <a:spcBef>
-                <a:spcPts val="300"/>
-              </a:spcBef>
-              <a:spcAft>
-                <a:spcPts val="300"/>
-              </a:spcAft>
-              <a:buNone/>
-            </a:pPr>
-            <a:r>
-              <a:rPr lang="en-US" sz="1200" b="1" dirty="0">
-                <a:solidFill>
-                  <a:srgbClr val="1A1A1A"/>
-                </a:solidFill>
-                <a:latin typeface="Georgia" pitchFamily="34" charset="0"/>
-                <a:ea typeface="Georgia" pitchFamily="34" charset="-122"/>
-                <a:cs typeface="Georgia" pitchFamily="34" charset="-120"/>
-              </a:rPr>
-              <a:t>Sprint 3 (10 min) — Begin drafting.</a:t>
-            </a:r>
-            <a:pPr algn="l" indent="0" marL="0">
-              <a:lnSpc>
-                <a:spcPts val="1680"/>
-              </a:lnSpc>
-              <a:spcBef>
-                <a:spcPts val="300"/>
-              </a:spcBef>
-              <a:spcAft>
-                <a:spcPts val="300"/>
-              </a:spcAft>
-              <a:buNone/>
-            </a:pPr>
-            <a:r>
-              <a:rPr lang="en-US" sz="1200" dirty="0">
-                <a:solidFill>
-                  <a:srgbClr val="1A1A1A"/>
-                </a:solidFill>
-                <a:latin typeface="Georgia" pitchFamily="34" charset="0"/>
-                <a:ea typeface="Georgia" pitchFamily="34" charset="-122"/>
-                <a:cs typeface="Georgia" pitchFamily="34" charset="-120"/>
-              </a:rPr>
-              <a:t> Each student starts the introduction or one body paragraph.</a:t>
-            </a:r>
-            <a:endParaRPr lang="en-US" sz="1200" dirty="0"/>
-          </a:p>
-        </p:txBody>
-      </p:sp>
-      <p:sp>
-        <p:nvSpPr>
-          <p:cNvPr id="8" name="Text 6"/>
           <p:cNvSpPr/>
           <p:nvPr/>
         </p:nvSpPr>
@@ -3223,7 +3878,7 @@
                 <a:ea typeface="Times New Roman" pitchFamily="34" charset="-122"/>
                 <a:cs typeface="Times New Roman" pitchFamily="34" charset="-120"/>
               </a:rPr>
-              <a:t>Wrap-up (10 min)</a:t>
+              <a:t>Core: outlining (30 min)</a:t>
             </a:r>
             <a:endParaRPr lang="en-US" sz="1800" dirty="0"/>
           </a:p>
@@ -3238,7 +3893,7 @@
         <p:spPr>
           <a:xfrm>
             <a:off x="406301" y="870942"/>
-            <a:ext cx="8498026" cy="426541"/>
+            <a:ext cx="8498026" cy="213271"/>
           </a:xfrm>
           <a:prstGeom prst="rect">
             <a:avLst/>
@@ -3263,6 +3918,29 @@
               <a:buNone/>
             </a:pPr>
             <a:r>
+              <a:rPr lang="en-US" sz="1200" b="1" dirty="0">
+                <a:solidFill>
+                  <a:srgbClr val="1A1A1A"/>
+                </a:solidFill>
+                <a:latin typeface="Georgia" pitchFamily="34" charset="0"/>
+                <a:ea typeface="Georgia" pitchFamily="34" charset="-122"/>
+                <a:cs typeface="Georgia" pitchFamily="34" charset="-120"/>
+              </a:rPr>
+              <a:t>Sprint 1 (10 min) — Topic.</a:t>
+            </a:r>
+            <a:pPr algn="l" indent="0" marL="0">
+              <a:lnSpc>
+                <a:spcPts val="1680"/>
+              </a:lnSpc>
+              <a:spcBef>
+                <a:spcPts val="300"/>
+              </a:spcBef>
+              <a:spcAft>
+                <a:spcPts val="300"/>
+              </a:spcAft>
+              <a:buNone/>
+            </a:pPr>
+            <a:r>
               <a:rPr lang="en-US" sz="1200" dirty="0">
                 <a:solidFill>
                   <a:srgbClr val="1A1A1A"/>
@@ -3271,7 +3949,7 @@
                 <a:ea typeface="Georgia" pitchFamily="34" charset="-122"/>
                 <a:cs typeface="Georgia" pitchFamily="34" charset="-120"/>
               </a:rPr>
-              <a:t>– Each student exchanges outline with one buddy. – 3-min mutual feedback: 1 strength + 1 fix. – Outline + thesis submitted at the door.</a:t>
+              <a:t> Each student writes:</a:t>
             </a:r>
             <a:endParaRPr lang="en-US" sz="1200" dirty="0"/>
           </a:p>
@@ -3280,6 +3958,171 @@
       <p:sp>
         <p:nvSpPr>
           <p:cNvPr id="5" name="Text 3"/>
+          <p:cNvSpPr/>
+          <p:nvPr/>
+        </p:nvSpPr>
+        <p:spPr>
+          <a:xfrm>
+            <a:off x="634901" y="1173063"/>
+            <a:ext cx="8102798" cy="769441"/>
+          </a:xfrm>
+          <a:prstGeom prst="rect">
+            <a:avLst/>
+          </a:prstGeom>
+          <a:noFill/>
+          <a:ln/>
+        </p:spPr>
+        <p:txBody>
+          <a:bodyPr wrap="square" lIns="0" tIns="0" rIns="0" bIns="0" rtlCol="0" anchor="t"/>
+          <a:lstStyle/>
+          <a:p>
+            <a:pPr algn="l" marL="342900" indent="-342900">
+              <a:lnSpc>
+                <a:spcPts val="1620"/>
+              </a:lnSpc>
+              <a:spcAft>
+                <a:spcPts val="300"/>
+              </a:spcAft>
+              <a:buSzPct val="100000"/>
+              <a:buChar char="•"/>
+            </a:pPr>
+            <a:r>
+              <a:rPr lang="en-US" sz="1200" dirty="0">
+                <a:solidFill>
+                  <a:srgbClr val="1A1A1A"/>
+                </a:solidFill>
+                <a:latin typeface="Georgia" pitchFamily="34" charset="0"/>
+                <a:ea typeface="Georgia" pitchFamily="34" charset="-122"/>
+                <a:cs typeface="Georgia" pitchFamily="34" charset="-120"/>
+              </a:rPr>
+              <a:t>Working title (1 line)</a:t>
+            </a:r>
+            <a:endParaRPr lang="en-US" sz="1200" dirty="0"/>
+          </a:p>
+          <a:p>
+            <a:pPr algn="l" marL="342900" indent="-342900">
+              <a:lnSpc>
+                <a:spcPts val="1620"/>
+              </a:lnSpc>
+              <a:spcAft>
+                <a:spcPts val="300"/>
+              </a:spcAft>
+              <a:buSzPct val="100000"/>
+              <a:buChar char="•"/>
+            </a:pPr>
+            <a:r>
+              <a:rPr lang="en-US" sz="1200" dirty="0">
+                <a:solidFill>
+                  <a:srgbClr val="1A1A1A"/>
+                </a:solidFill>
+                <a:latin typeface="Georgia" pitchFamily="34" charset="0"/>
+                <a:ea typeface="Georgia" pitchFamily="34" charset="-122"/>
+                <a:cs typeface="Georgia" pitchFamily="34" charset="-120"/>
+              </a:rPr>
+              <a:t>One-paragraph thesis (3–4 sentences)</a:t>
+            </a:r>
+            <a:endParaRPr lang="en-US" sz="1200" dirty="0"/>
+          </a:p>
+          <a:p>
+            <a:pPr algn="l" marL="342900" indent="-342900">
+              <a:lnSpc>
+                <a:spcPts val="1620"/>
+              </a:lnSpc>
+              <a:spcAft>
+                <a:spcPts val="300"/>
+              </a:spcAft>
+              <a:buSzPct val="100000"/>
+              <a:buChar char="•"/>
+            </a:pPr>
+            <a:r>
+              <a:rPr lang="en-US" sz="1200" dirty="0">
+                <a:solidFill>
+                  <a:srgbClr val="1A1A1A"/>
+                </a:solidFill>
+                <a:latin typeface="Georgia" pitchFamily="34" charset="0"/>
+                <a:ea typeface="Georgia" pitchFamily="34" charset="-122"/>
+                <a:cs typeface="Georgia" pitchFamily="34" charset="-120"/>
+              </a:rPr>
+              <a:t>3 sources they'll cite (must include one primary scriptural, one secondary scholarly, one comparative or modern)</a:t>
+            </a:r>
+            <a:endParaRPr lang="en-US" sz="1200" dirty="0"/>
+          </a:p>
+        </p:txBody>
+      </p:sp>
+      <p:sp>
+        <p:nvSpPr>
+          <p:cNvPr id="6" name="Text 4"/>
+          <p:cNvSpPr/>
+          <p:nvPr/>
+        </p:nvSpPr>
+        <p:spPr>
+          <a:xfrm>
+            <a:off x="406301" y="2031355"/>
+            <a:ext cx="8498026" cy="426541"/>
+          </a:xfrm>
+          <a:prstGeom prst="rect">
+            <a:avLst/>
+          </a:prstGeom>
+          <a:noFill/>
+          <a:ln/>
+        </p:spPr>
+        <p:txBody>
+          <a:bodyPr wrap="square" lIns="0" tIns="0" rIns="0" bIns="0" rtlCol="0" anchor="t"/>
+          <a:lstStyle/>
+          <a:p>
+            <a:pPr algn="l" indent="0" marL="0">
+              <a:lnSpc>
+                <a:spcPts val="1680"/>
+              </a:lnSpc>
+              <a:spcBef>
+                <a:spcPts val="300"/>
+              </a:spcBef>
+              <a:spcAft>
+                <a:spcPts val="300"/>
+              </a:spcAft>
+              <a:buNone/>
+            </a:pPr>
+            <a:r>
+              <a:rPr lang="en-US" sz="1200" dirty="0">
+                <a:solidFill>
+                  <a:srgbClr val="1A1A1A"/>
+                </a:solidFill>
+                <a:latin typeface="Georgia" pitchFamily="34" charset="0"/>
+                <a:ea typeface="Georgia" pitchFamily="34" charset="-122"/>
+                <a:cs typeface="Georgia" pitchFamily="34" charset="-120"/>
+              </a:rPr>
+              <a:t>Teacher rotates: 60 sec per student, single question: </a:t>
+            </a:r>
+            <a:pPr algn="l" indent="0" marL="0">
+              <a:lnSpc>
+                <a:spcPts val="1680"/>
+              </a:lnSpc>
+              <a:spcBef>
+                <a:spcPts val="300"/>
+              </a:spcBef>
+              <a:spcAft>
+                <a:spcPts val="300"/>
+              </a:spcAft>
+              <a:buNone/>
+            </a:pPr>
+            <a:r>
+              <a:rPr lang="en-US" sz="1200" i="1" dirty="0">
+                <a:solidFill>
+                  <a:srgbClr val="1A1A1A"/>
+                </a:solidFill>
+                <a:latin typeface="Georgia" pitchFamily="34" charset="0"/>
+                <a:ea typeface="Georgia" pitchFamily="34" charset="-122"/>
+                <a:cs typeface="Georgia" pitchFamily="34" charset="-120"/>
+              </a:rPr>
+              <a:t>"What's the counter-argument someone could make against your thesis?"</a:t>
+            </a:r>
+            <a:endParaRPr lang="en-US" sz="1200" dirty="0"/>
+          </a:p>
+        </p:txBody>
+      </p:sp>
+      <p:sp>
+        <p:nvSpPr>
+          <p:cNvPr id="7" name="Text 5"/>
           <p:cNvSpPr/>
           <p:nvPr/>
         </p:nvSpPr>
@@ -3429,7 +4272,7 @@
                 <a:ea typeface="Times New Roman" pitchFamily="34" charset="-122"/>
                 <a:cs typeface="Times New Roman" pitchFamily="34" charset="-120"/>
               </a:rPr>
-              <a:t>Homework</a:t>
+              <a:t>Core: outlining (30 min) (cont.)</a:t>
             </a:r>
             <a:endParaRPr lang="en-US" sz="1800" dirty="0"/>
           </a:p>
@@ -3469,6 +4312,29 @@
               <a:buNone/>
             </a:pPr>
             <a:r>
+              <a:rPr lang="en-US" sz="1200" b="1" dirty="0">
+                <a:solidFill>
+                  <a:srgbClr val="1A1A1A"/>
+                </a:solidFill>
+                <a:latin typeface="Georgia" pitchFamily="34" charset="0"/>
+                <a:ea typeface="Georgia" pitchFamily="34" charset="-122"/>
+                <a:cs typeface="Georgia" pitchFamily="34" charset="-120"/>
+              </a:rPr>
+              <a:t>Sprint 2 (10 min) — Outline.</a:t>
+            </a:r>
+            <a:pPr algn="l" indent="0" marL="0">
+              <a:lnSpc>
+                <a:spcPts val="1680"/>
+              </a:lnSpc>
+              <a:spcBef>
+                <a:spcPts val="300"/>
+              </a:spcBef>
+              <a:spcAft>
+                <a:spcPts val="300"/>
+              </a:spcAft>
+              <a:buNone/>
+            </a:pPr>
+            <a:r>
               <a:rPr lang="en-US" sz="1200" dirty="0">
                 <a:solidFill>
                   <a:srgbClr val="1A1A1A"/>
@@ -3477,7 +4343,7 @@
                 <a:ea typeface="Georgia" pitchFamily="34" charset="-122"/>
                 <a:cs typeface="Georgia" pitchFamily="34" charset="-120"/>
               </a:rPr>
-              <a:t>– Draft 1–2 more paragraphs at home. Bring everything tomorrow.</a:t>
+              <a:t> Each student writes section headings + 1-line sub-points:</a:t>
             </a:r>
             <a:endParaRPr lang="en-US" sz="1200" dirty="0"/>
           </a:p>
@@ -3486,6 +4352,148 @@
       <p:sp>
         <p:nvSpPr>
           <p:cNvPr id="5" name="Text 3"/>
+          <p:cNvSpPr/>
+          <p:nvPr/>
+        </p:nvSpPr>
+        <p:spPr>
+          <a:xfrm>
+            <a:off x="634901" y="1173063"/>
+            <a:ext cx="8102798" cy="1257002"/>
+          </a:xfrm>
+          <a:prstGeom prst="rect">
+            <a:avLst/>
+          </a:prstGeom>
+          <a:noFill/>
+          <a:ln/>
+        </p:spPr>
+        <p:txBody>
+          <a:bodyPr wrap="square" lIns="0" tIns="0" rIns="0" bIns="0" rtlCol="0" anchor="t"/>
+          <a:lstStyle/>
+          <a:p>
+            <a:pPr algn="l" marL="342900" indent="-342900">
+              <a:lnSpc>
+                <a:spcPts val="1620"/>
+              </a:lnSpc>
+              <a:spcAft>
+                <a:spcPts val="300"/>
+              </a:spcAft>
+              <a:buSzPct val="100000"/>
+              <a:buChar char="•"/>
+            </a:pPr>
+            <a:r>
+              <a:rPr lang="en-US" sz="1200" dirty="0">
+                <a:solidFill>
+                  <a:srgbClr val="1A1A1A"/>
+                </a:solidFill>
+                <a:latin typeface="Georgia" pitchFamily="34" charset="0"/>
+                <a:ea typeface="Georgia" pitchFamily="34" charset="-122"/>
+                <a:cs typeface="Georgia" pitchFamily="34" charset="-120"/>
+              </a:rPr>
+              <a:t>Introduction (with thesis statement)</a:t>
+            </a:r>
+            <a:endParaRPr lang="en-US" sz="1200" dirty="0"/>
+          </a:p>
+          <a:p>
+            <a:pPr algn="l" marL="342900" indent="-342900">
+              <a:lnSpc>
+                <a:spcPts val="1620"/>
+              </a:lnSpc>
+              <a:spcAft>
+                <a:spcPts val="300"/>
+              </a:spcAft>
+              <a:buSzPct val="100000"/>
+              <a:buChar char="•"/>
+            </a:pPr>
+            <a:r>
+              <a:rPr lang="en-US" sz="1200" dirty="0">
+                <a:solidFill>
+                  <a:srgbClr val="1A1A1A"/>
+                </a:solidFill>
+                <a:latin typeface="Georgia" pitchFamily="34" charset="0"/>
+                <a:ea typeface="Georgia" pitchFamily="34" charset="-122"/>
+                <a:cs typeface="Georgia" pitchFamily="34" charset="-120"/>
+              </a:rPr>
+              <a:t>Section 1 (anchor claim + source)</a:t>
+            </a:r>
+            <a:endParaRPr lang="en-US" sz="1200" dirty="0"/>
+          </a:p>
+          <a:p>
+            <a:pPr algn="l" marL="342900" indent="-342900">
+              <a:lnSpc>
+                <a:spcPts val="1620"/>
+              </a:lnSpc>
+              <a:spcAft>
+                <a:spcPts val="300"/>
+              </a:spcAft>
+              <a:buSzPct val="100000"/>
+              <a:buChar char="•"/>
+            </a:pPr>
+            <a:r>
+              <a:rPr lang="en-US" sz="1200" dirty="0">
+                <a:solidFill>
+                  <a:srgbClr val="1A1A1A"/>
+                </a:solidFill>
+                <a:latin typeface="Georgia" pitchFamily="34" charset="0"/>
+                <a:ea typeface="Georgia" pitchFamily="34" charset="-122"/>
+                <a:cs typeface="Georgia" pitchFamily="34" charset="-120"/>
+              </a:rPr>
+              <a:t>Section 2 (anchor claim + source)</a:t>
+            </a:r>
+            <a:endParaRPr lang="en-US" sz="1200" dirty="0"/>
+          </a:p>
+          <a:p>
+            <a:pPr algn="l" marL="342900" indent="-342900">
+              <a:lnSpc>
+                <a:spcPts val="1620"/>
+              </a:lnSpc>
+              <a:spcAft>
+                <a:spcPts val="300"/>
+              </a:spcAft>
+              <a:buSzPct val="100000"/>
+              <a:buChar char="•"/>
+            </a:pPr>
+            <a:r>
+              <a:rPr lang="en-US" sz="1200" dirty="0">
+                <a:solidFill>
+                  <a:srgbClr val="1A1A1A"/>
+                </a:solidFill>
+                <a:latin typeface="Georgia" pitchFamily="34" charset="0"/>
+                <a:ea typeface="Georgia" pitchFamily="34" charset="-122"/>
+                <a:cs typeface="Georgia" pitchFamily="34" charset="-120"/>
+              </a:rPr>
+              <a:t>Counter-argument and response</a:t>
+            </a:r>
+            <a:endParaRPr lang="en-US" sz="1200" dirty="0"/>
+          </a:p>
+          <a:p>
+            <a:pPr algn="l" marL="342900" indent="-342900">
+              <a:lnSpc>
+                <a:spcPts val="1620"/>
+              </a:lnSpc>
+              <a:spcAft>
+                <a:spcPts val="300"/>
+              </a:spcAft>
+              <a:buSzPct val="100000"/>
+              <a:buChar char="•"/>
+            </a:pPr>
+            <a:r>
+              <a:rPr lang="en-US" sz="1200" dirty="0">
+                <a:solidFill>
+                  <a:srgbClr val="1A1A1A"/>
+                </a:solidFill>
+                <a:latin typeface="Georgia" pitchFamily="34" charset="0"/>
+                <a:ea typeface="Georgia" pitchFamily="34" charset="-122"/>
+                <a:cs typeface="Georgia" pitchFamily="34" charset="-120"/>
+              </a:rPr>
+              <a:t>Conclusion</a:t>
+            </a:r>
+            <a:endParaRPr lang="en-US" sz="1200" dirty="0"/>
+          </a:p>
+        </p:txBody>
+      </p:sp>
+      <p:sp>
+        <p:nvSpPr>
+          <p:cNvPr id="6" name="Text 4"/>
           <p:cNvSpPr/>
           <p:nvPr/>
         </p:nvSpPr>
@@ -3635,7 +4643,7 @@
                 <a:ea typeface="Times New Roman" pitchFamily="34" charset="-122"/>
                 <a:cs typeface="Times New Roman" pitchFamily="34" charset="-120"/>
               </a:rPr>
-              <a:t>Differentiation</a:t>
+              <a:t>Core: outlining (30 min) (cont.)</a:t>
             </a:r>
             <a:endParaRPr lang="en-US" sz="1800" dirty="0"/>
           </a:p>
@@ -3649,8 +4657,8 @@
         </p:nvSpPr>
         <p:spPr>
           <a:xfrm>
-            <a:off x="634901" y="883593"/>
-            <a:ext cx="8102798" cy="731341"/>
+            <a:off x="406301" y="870942"/>
+            <a:ext cx="8498026" cy="213271"/>
           </a:xfrm>
           <a:prstGeom prst="rect">
             <a:avLst/>
@@ -3662,15 +4670,17 @@
           <a:bodyPr wrap="square" lIns="0" tIns="0" rIns="0" bIns="0" rtlCol="0" anchor="t"/>
           <a:lstStyle/>
           <a:p>
-            <a:pPr algn="l" marL="342900" indent="-342900">
-              <a:lnSpc>
-                <a:spcPts val="1620"/>
-              </a:lnSpc>
-              <a:spcAft>
-                <a:spcPts val="300"/>
-              </a:spcAft>
-              <a:buSzPct val="100000"/>
-              <a:buChar char="•"/>
+            <a:pPr algn="l" indent="0" marL="0">
+              <a:lnSpc>
+                <a:spcPts val="1680"/>
+              </a:lnSpc>
+              <a:spcBef>
+                <a:spcPts val="300"/>
+              </a:spcBef>
+              <a:spcAft>
+                <a:spcPts val="300"/>
+              </a:spcAft>
+              <a:buNone/>
             </a:pPr>
             <a:r>
               <a:rPr lang="en-US" sz="1200" b="1" dirty="0">
@@ -3681,12 +4691,15 @@
                 <a:ea typeface="Georgia" pitchFamily="34" charset="-122"/>
                 <a:cs typeface="Georgia" pitchFamily="34" charset="-120"/>
               </a:rPr>
-              <a:t>Tier up:</a:t>
+              <a:t>Sprint 3 (10 min) — Begin drafting.</a:t>
             </a:r>
             <a:pPr algn="l" indent="0" marL="0">
               <a:lnSpc>
-                <a:spcPts val="1620"/>
-              </a:lnSpc>
+                <a:spcPts val="1680"/>
+              </a:lnSpc>
+              <a:spcBef>
+                <a:spcPts val="300"/>
+              </a:spcBef>
               <a:spcAft>
                 <a:spcPts val="300"/>
               </a:spcAft>
@@ -3701,51 +4714,7 @@
                 <a:ea typeface="Georgia" pitchFamily="34" charset="-122"/>
                 <a:cs typeface="Georgia" pitchFamily="34" charset="-120"/>
               </a:rPr>
-              <a:t> Add a 4th source — a contemporary academic article (search Google Scholar).</a:t>
-            </a:r>
-            <a:endParaRPr lang="en-US" sz="1200" dirty="0"/>
-          </a:p>
-          <a:p>
-            <a:pPr algn="l" marL="342900" indent="-342900">
-              <a:lnSpc>
-                <a:spcPts val="1620"/>
-              </a:lnSpc>
-              <a:spcAft>
-                <a:spcPts val="300"/>
-              </a:spcAft>
-              <a:buSzPct val="100000"/>
-              <a:buChar char="•"/>
-            </a:pPr>
-            <a:r>
-              <a:rPr lang="en-US" sz="1200" b="1" dirty="0">
-                <a:solidFill>
-                  <a:srgbClr val="1A1A1A"/>
-                </a:solidFill>
-                <a:latin typeface="Georgia" pitchFamily="34" charset="0"/>
-                <a:ea typeface="Georgia" pitchFamily="34" charset="-122"/>
-                <a:cs typeface="Georgia" pitchFamily="34" charset="-120"/>
-              </a:rPr>
-              <a:t>Tier down:</a:t>
-            </a:r>
-            <a:pPr algn="l" indent="0" marL="0">
-              <a:lnSpc>
-                <a:spcPts val="1620"/>
-              </a:lnSpc>
-              <a:spcAft>
-                <a:spcPts val="300"/>
-              </a:spcAft>
-              <a:buNone/>
-            </a:pPr>
-            <a:r>
-              <a:rPr lang="en-US" sz="1200" dirty="0">
-                <a:solidFill>
-                  <a:srgbClr val="1A1A1A"/>
-                </a:solidFill>
-                <a:latin typeface="Georgia" pitchFamily="34" charset="0"/>
-                <a:ea typeface="Georgia" pitchFamily="34" charset="-122"/>
-                <a:cs typeface="Georgia" pitchFamily="34" charset="-120"/>
-              </a:rPr>
-              <a:t> Topic can be narrow ("a comparison of one Sāṅkhya tanmātra concept with the modern five-senses model"). Narrower is fine.</a:t>
+              <a:t> Each student starts the introduction or one body paragraph.</a:t>
             </a:r>
             <a:endParaRPr lang="en-US" sz="1200" dirty="0"/>
           </a:p>
@@ -3903,7 +4872,7 @@
                 <a:ea typeface="Times New Roman" pitchFamily="34" charset="-122"/>
                 <a:cs typeface="Times New Roman" pitchFamily="34" charset="-120"/>
               </a:rPr>
-              <a:t>Teacher notes</a:t>
+              <a:t>Wrap-up (10 min)</a:t>
             </a:r>
             <a:endParaRPr lang="en-US" sz="1800" dirty="0"/>
           </a:p>
@@ -3917,8 +4886,8 @@
         </p:nvSpPr>
         <p:spPr>
           <a:xfrm>
-            <a:off x="406301" y="870942"/>
-            <a:ext cx="8498026" cy="639812"/>
+            <a:off x="634901" y="883593"/>
+            <a:ext cx="8102798" cy="769441"/>
           </a:xfrm>
           <a:prstGeom prst="rect">
             <a:avLst/>
@@ -3930,17 +4899,15 @@
           <a:bodyPr wrap="square" lIns="0" tIns="0" rIns="0" bIns="0" rtlCol="0" anchor="t"/>
           <a:lstStyle/>
           <a:p>
-            <a:pPr algn="l" indent="0" marL="0">
-              <a:lnSpc>
-                <a:spcPts val="1680"/>
-              </a:lnSpc>
-              <a:spcBef>
-                <a:spcPts val="300"/>
-              </a:spcBef>
-              <a:spcAft>
-                <a:spcPts val="300"/>
-              </a:spcAft>
-              <a:buNone/>
+            <a:pPr algn="l" marL="342900" indent="-342900">
+              <a:lnSpc>
+                <a:spcPts val="1620"/>
+              </a:lnSpc>
+              <a:spcAft>
+                <a:spcPts val="300"/>
+              </a:spcAft>
+              <a:buSzPct val="100000"/>
+              <a:buChar char="•"/>
             </a:pPr>
             <a:r>
               <a:rPr lang="en-US" sz="1200" dirty="0">
@@ -3951,7 +4918,55 @@
                 <a:ea typeface="Georgia" pitchFamily="34" charset="-122"/>
                 <a:cs typeface="Georgia" pitchFamily="34" charset="-120"/>
               </a:rPr>
-              <a:t>– Common pitfall: too-broad topic. Push for specificity early. – A weak thesis sounds like "Indian science is interesting." A strong thesis sounds like "The Sāṅkhya tanmātra–indriya symmetry offers a model that 19th-century European psychophysics independently rediscovered."</a:t>
+              <a:t>Each student exchanges outline with one buddy.</a:t>
+            </a:r>
+            <a:endParaRPr lang="en-US" sz="1200" dirty="0"/>
+          </a:p>
+          <a:p>
+            <a:pPr algn="l" marL="342900" indent="-342900">
+              <a:lnSpc>
+                <a:spcPts val="1620"/>
+              </a:lnSpc>
+              <a:spcAft>
+                <a:spcPts val="300"/>
+              </a:spcAft>
+              <a:buSzPct val="100000"/>
+              <a:buChar char="•"/>
+            </a:pPr>
+            <a:r>
+              <a:rPr lang="en-US" sz="1200" dirty="0">
+                <a:solidFill>
+                  <a:srgbClr val="1A1A1A"/>
+                </a:solidFill>
+                <a:latin typeface="Georgia" pitchFamily="34" charset="0"/>
+                <a:ea typeface="Georgia" pitchFamily="34" charset="-122"/>
+                <a:cs typeface="Georgia" pitchFamily="34" charset="-120"/>
+              </a:rPr>
+              <a:t>3-min mutual feedback: 1 strength + 1 fix.</a:t>
+            </a:r>
+            <a:endParaRPr lang="en-US" sz="1200" dirty="0"/>
+          </a:p>
+          <a:p>
+            <a:pPr algn="l" marL="342900" indent="-342900">
+              <a:lnSpc>
+                <a:spcPts val="1620"/>
+              </a:lnSpc>
+              <a:spcAft>
+                <a:spcPts val="300"/>
+              </a:spcAft>
+              <a:buSzPct val="100000"/>
+              <a:buChar char="•"/>
+            </a:pPr>
+            <a:r>
+              <a:rPr lang="en-US" sz="1200" dirty="0">
+                <a:solidFill>
+                  <a:srgbClr val="1A1A1A"/>
+                </a:solidFill>
+                <a:latin typeface="Georgia" pitchFamily="34" charset="0"/>
+                <a:ea typeface="Georgia" pitchFamily="34" charset="-122"/>
+                <a:cs typeface="Georgia" pitchFamily="34" charset="-120"/>
+              </a:rPr>
+              <a:t>Outline + thesis submitted at the door.</a:t>
             </a:r>
             <a:endParaRPr lang="en-US" sz="1200" dirty="0"/>
           </a:p>
